--- a/assets/pptx/catalog-167.pptx
+++ b/assets/pptx/catalog-167.pptx
@@ -3302,7 +3302,7 @@
                 <a:ea typeface="Ebrima"/>
                 <a:cs typeface="Ebrima"/>
               </a:rPr>
-              <a:t>አንድ እኮ ነህ ለእኔ (2x)</a:t>
+              <a:t>አንድ እኮ ነህ ለእኔ 2x</a:t>
             </a:r>
           </a:p>
         </p:txBody>
@@ -3387,7 +3387,7 @@
                 <a:ea typeface="Ebrima"/>
                 <a:cs typeface="Ebrima"/>
               </a:rPr>
-              <a:t>የለኝም የማቆመው/የምተካው በአንተ ቦታ (2x)</a:t>
+              <a:t>የለኝም የማቆመው/የምተካው በአንተ ቦታ 2x</a:t>
             </a:r>
           </a:p>
         </p:txBody>
@@ -3508,7 +3508,7 @@
                 <a:ea typeface="Ebrima"/>
                 <a:cs typeface="Ebrima"/>
               </a:rPr>
-              <a:t>ባንተ ቦታ የሚቆምለት ማነው (2x)</a:t>
+              <a:t>ባንተ ቦታ የሚቆምለት ማነው 2x</a:t>
             </a:r>
           </a:p>
         </p:txBody>
@@ -3629,7 +3629,7 @@
                 <a:ea typeface="Ebrima"/>
                 <a:cs typeface="Ebrima"/>
               </a:rPr>
-              <a:t>አንተ የለም ምትክ (2x)</a:t>
+              <a:t>አንተ የለም ምትክ 2x</a:t>
             </a:r>
           </a:p>
         </p:txBody>
@@ -3732,7 +3732,7 @@
                 <a:ea typeface="Ebrima"/>
                 <a:cs typeface="Ebrima"/>
               </a:rPr>
-              <a:t>የቅርቡ ተጠሪዬ (2x)</a:t>
+              <a:t>የቅርቡ ተጠሪዬ 2x</a:t>
             </a:r>
           </a:p>
         </p:txBody>
@@ -3799,7 +3799,7 @@
                 <a:ea typeface="Ebrima"/>
                 <a:cs typeface="Ebrima"/>
               </a:rPr>
-              <a:t>ከአንተ ሌላ ለእኔ ማነዉ (2x)</a:t>
+              <a:t>ከአንተ ሌላ ለእኔ ማነዉ 2x</a:t>
             </a:r>
           </a:p>
           <a:p>
@@ -3817,7 +3817,7 @@
                 <a:ea typeface="Ebrima"/>
                 <a:cs typeface="Ebrima"/>
               </a:rPr>
-              <a:t>ከአንተስ ሌላ ለእኔስ ለምኔ (2x)</a:t>
+              <a:t>ከአንተስ ሌላ ለእኔስ ለምኔ 2x</a:t>
             </a:r>
           </a:p>
         </p:txBody>
@@ -3884,7 +3884,7 @@
                 <a:ea typeface="Ebrima"/>
                 <a:cs typeface="Ebrima"/>
               </a:rPr>
-              <a:t>ፍቅርህ ከወይን ጠጅ ይልቅ ይጣፍጣል (2x)</a:t>
+              <a:t>ፍቅርህ ከወይን ጠጅ ይልቅ ይጣፍጣል 2x</a:t>
             </a:r>
           </a:p>
           <a:p>
@@ -3902,7 +3902,7 @@
                 <a:ea typeface="Ebrima"/>
                 <a:cs typeface="Ebrima"/>
               </a:rPr>
-              <a:t>ፍቅርህ ከማር ወለላም ይመረጣል (2x)</a:t>
+              <a:t>ፍቅርህ ከማር ወለላም ይመረጣል 2x</a:t>
             </a:r>
           </a:p>
         </p:txBody>
@@ -3969,7 +3969,7 @@
                 <a:ea typeface="Ebrima"/>
                 <a:cs typeface="Ebrima"/>
               </a:rPr>
-              <a:t>ይመረጣል አሃሃ ይመረጣል (2x)</a:t>
+              <a:t>ይመረጣል አሃሃ ይመረጣል 2x</a:t>
             </a:r>
           </a:p>
         </p:txBody>
